--- a/public/fun/cards/public/명함_공무원_24_딥틸.pptx
+++ b/public/fun/cards/public/명함_공무원_24_딥틸.pptx
@@ -3203,8 +3203,8 @@
         </p:nvSpPr>
         <p:spPr>
           <a:xfrm>
-            <a:off x="252000" y="396000"/>
-            <a:ext cx="2520000" cy="432000"/>
+            <a:off x="252000" y="540000"/>
+            <a:ext cx="2520000" cy="273600"/>
           </a:xfrm>
           <a:prstGeom prst="rect">
             <a:avLst/>
@@ -3219,11 +3219,11 @@
           <a:p>
             <a:pPr algn="l">
               <a:lnSpc>
-                <a:spcPts val="3625"/>
+                <a:spcPts val="2030"/>
               </a:lnSpc>
             </a:pPr>
             <a:r>
-              <a:rPr sz="2500" b="1" spc="100">
+              <a:rPr sz="1400" b="1" spc="100">
                 <a:solidFill>
                   <a:srgbClr val="1B2230"/>
                 </a:solidFill>
